--- a/ゲーム科1年/01_後期/プログラミングⅢ/01_クラス.pptx
+++ b/ゲーム科1年/01_後期/プログラミングⅢ/01_クラス.pptx
@@ -269,7 +269,7 @@
           <a:p>
             <a:fld id="{E9CC885B-4903-4D54-9A93-00025F12DED9}" type="datetimeFigureOut">
               <a:rPr kumimoji="1" lang="ja-JP" altLang="en-US" smtClean="0"/>
-              <a:t>2024/11/8</a:t>
+              <a:t>2025/2/7</a:t>
             </a:fld>
             <a:endParaRPr kumimoji="1" lang="ja-JP" altLang="en-US"/>
           </a:p>
@@ -499,7 +499,7 @@
           <a:p>
             <a:fld id="{E9CC885B-4903-4D54-9A93-00025F12DED9}" type="datetimeFigureOut">
               <a:rPr kumimoji="1" lang="ja-JP" altLang="en-US" smtClean="0"/>
-              <a:t>2024/11/8</a:t>
+              <a:t>2025/2/7</a:t>
             </a:fld>
             <a:endParaRPr kumimoji="1" lang="ja-JP" altLang="en-US"/>
           </a:p>
@@ -739,7 +739,7 @@
           <a:p>
             <a:fld id="{E9CC885B-4903-4D54-9A93-00025F12DED9}" type="datetimeFigureOut">
               <a:rPr kumimoji="1" lang="ja-JP" altLang="en-US" smtClean="0"/>
-              <a:t>2024/11/8</a:t>
+              <a:t>2025/2/7</a:t>
             </a:fld>
             <a:endParaRPr kumimoji="1" lang="ja-JP" altLang="en-US"/>
           </a:p>
@@ -969,7 +969,7 @@
           <a:p>
             <a:fld id="{E9CC885B-4903-4D54-9A93-00025F12DED9}" type="datetimeFigureOut">
               <a:rPr kumimoji="1" lang="ja-JP" altLang="en-US" smtClean="0"/>
-              <a:t>2024/11/8</a:t>
+              <a:t>2025/2/7</a:t>
             </a:fld>
             <a:endParaRPr kumimoji="1" lang="ja-JP" altLang="en-US"/>
           </a:p>
@@ -1244,7 +1244,7 @@
           <a:p>
             <a:fld id="{E9CC885B-4903-4D54-9A93-00025F12DED9}" type="datetimeFigureOut">
               <a:rPr kumimoji="1" lang="ja-JP" altLang="en-US" smtClean="0"/>
-              <a:t>2024/11/8</a:t>
+              <a:t>2025/2/7</a:t>
             </a:fld>
             <a:endParaRPr kumimoji="1" lang="ja-JP" altLang="en-US"/>
           </a:p>
@@ -1573,7 +1573,7 @@
           <a:p>
             <a:fld id="{E9CC885B-4903-4D54-9A93-00025F12DED9}" type="datetimeFigureOut">
               <a:rPr kumimoji="1" lang="ja-JP" altLang="en-US" smtClean="0"/>
-              <a:t>2024/11/8</a:t>
+              <a:t>2025/2/7</a:t>
             </a:fld>
             <a:endParaRPr kumimoji="1" lang="ja-JP" altLang="en-US"/>
           </a:p>
@@ -2049,7 +2049,7 @@
           <a:p>
             <a:fld id="{E9CC885B-4903-4D54-9A93-00025F12DED9}" type="datetimeFigureOut">
               <a:rPr kumimoji="1" lang="ja-JP" altLang="en-US" smtClean="0"/>
-              <a:t>2024/11/8</a:t>
+              <a:t>2025/2/7</a:t>
             </a:fld>
             <a:endParaRPr kumimoji="1" lang="ja-JP" altLang="en-US"/>
           </a:p>
@@ -2190,7 +2190,7 @@
           <a:p>
             <a:fld id="{E9CC885B-4903-4D54-9A93-00025F12DED9}" type="datetimeFigureOut">
               <a:rPr kumimoji="1" lang="ja-JP" altLang="en-US" smtClean="0"/>
-              <a:t>2024/11/8</a:t>
+              <a:t>2025/2/7</a:t>
             </a:fld>
             <a:endParaRPr kumimoji="1" lang="ja-JP" altLang="en-US"/>
           </a:p>
@@ -2303,7 +2303,7 @@
           <a:p>
             <a:fld id="{E9CC885B-4903-4D54-9A93-00025F12DED9}" type="datetimeFigureOut">
               <a:rPr kumimoji="1" lang="ja-JP" altLang="en-US" smtClean="0"/>
-              <a:t>2024/11/8</a:t>
+              <a:t>2025/2/7</a:t>
             </a:fld>
             <a:endParaRPr kumimoji="1" lang="ja-JP" altLang="en-US"/>
           </a:p>
@@ -2646,7 +2646,7 @@
           <a:p>
             <a:fld id="{E9CC885B-4903-4D54-9A93-00025F12DED9}" type="datetimeFigureOut">
               <a:rPr kumimoji="1" lang="ja-JP" altLang="en-US" smtClean="0"/>
-              <a:t>2024/11/8</a:t>
+              <a:t>2025/2/7</a:t>
             </a:fld>
             <a:endParaRPr kumimoji="1" lang="ja-JP" altLang="en-US"/>
           </a:p>
@@ -2934,7 +2934,7 @@
           <a:p>
             <a:fld id="{E9CC885B-4903-4D54-9A93-00025F12DED9}" type="datetimeFigureOut">
               <a:rPr kumimoji="1" lang="ja-JP" altLang="en-US" smtClean="0"/>
-              <a:t>2024/11/8</a:t>
+              <a:t>2025/2/7</a:t>
             </a:fld>
             <a:endParaRPr kumimoji="1" lang="ja-JP" altLang="en-US"/>
           </a:p>
@@ -3207,7 +3207,7 @@
           <a:p>
             <a:fld id="{E9CC885B-4903-4D54-9A93-00025F12DED9}" type="datetimeFigureOut">
               <a:rPr kumimoji="1" lang="ja-JP" altLang="en-US" smtClean="0"/>
-              <a:t>2024/11/8</a:t>
+              <a:t>2025/2/7</a:t>
             </a:fld>
             <a:endParaRPr kumimoji="1" lang="ja-JP" altLang="en-US"/>
           </a:p>
@@ -4696,10 +4696,10 @@
       </p:sp>
       <p:pic>
         <p:nvPicPr>
-          <p:cNvPr id="5" name="図 4">
-            <a:extLst>
-              <a:ext uri="{FF2B5EF4-FFF2-40B4-BE49-F238E27FC236}">
-                <a16:creationId xmlns:a16="http://schemas.microsoft.com/office/drawing/2014/main" id="{DF188504-2F55-4C25-96A9-870DC687FC0D}"/>
+          <p:cNvPr id="7" name="図 6">
+            <a:extLst>
+              <a:ext uri="{FF2B5EF4-FFF2-40B4-BE49-F238E27FC236}">
+                <a16:creationId xmlns:a16="http://schemas.microsoft.com/office/drawing/2014/main" id="{2A0A210F-D2F7-4A97-A562-3EB8632C41E2}"/>
               </a:ext>
             </a:extLst>
           </p:cNvPr>
@@ -4717,7 +4717,7 @@
         <p:spPr>
           <a:xfrm>
             <a:off x="567542" y="1817794"/>
-            <a:ext cx="6829144" cy="4303606"/>
+            <a:ext cx="5868219" cy="3781953"/>
           </a:xfrm>
           <a:prstGeom prst="rect">
             <a:avLst/>
@@ -4726,10 +4726,10 @@
       </p:pic>
       <p:sp>
         <p:nvSpPr>
-          <p:cNvPr id="2" name="正方形/長方形 1">
-            <a:extLst>
-              <a:ext uri="{FF2B5EF4-FFF2-40B4-BE49-F238E27FC236}">
-                <a16:creationId xmlns:a16="http://schemas.microsoft.com/office/drawing/2014/main" id="{0247B5A7-FD77-46CF-AAB3-210FA98E243E}"/>
+          <p:cNvPr id="8" name="正方形/長方形 7">
+            <a:extLst>
+              <a:ext uri="{FF2B5EF4-FFF2-40B4-BE49-F238E27FC236}">
+                <a16:creationId xmlns:a16="http://schemas.microsoft.com/office/drawing/2014/main" id="{9EF718C7-9320-4CDD-9D08-61BD18F0B301}"/>
               </a:ext>
             </a:extLst>
           </p:cNvPr>
@@ -4738,8 +4738,8 @@
         </p:nvSpPr>
         <p:spPr>
           <a:xfrm>
-            <a:off x="1983314" y="3327401"/>
-            <a:ext cx="5413372" cy="1803399"/>
+            <a:off x="1619247" y="3031066"/>
+            <a:ext cx="5413372" cy="1574801"/>
           </a:xfrm>
           <a:prstGeom prst="rect">
             <a:avLst/>

--- a/ゲーム科1年/01_後期/プログラミングⅢ/01_クラス.pptx
+++ b/ゲーム科1年/01_後期/プログラミングⅢ/01_クラス.pptx
@@ -269,7 +269,7 @@
           <a:p>
             <a:fld id="{E9CC885B-4903-4D54-9A93-00025F12DED9}" type="datetimeFigureOut">
               <a:rPr kumimoji="1" lang="ja-JP" altLang="en-US" smtClean="0"/>
-              <a:t>2025/2/7</a:t>
+              <a:t>2025/2/28</a:t>
             </a:fld>
             <a:endParaRPr kumimoji="1" lang="ja-JP" altLang="en-US"/>
           </a:p>
@@ -499,7 +499,7 @@
           <a:p>
             <a:fld id="{E9CC885B-4903-4D54-9A93-00025F12DED9}" type="datetimeFigureOut">
               <a:rPr kumimoji="1" lang="ja-JP" altLang="en-US" smtClean="0"/>
-              <a:t>2025/2/7</a:t>
+              <a:t>2025/2/28</a:t>
             </a:fld>
             <a:endParaRPr kumimoji="1" lang="ja-JP" altLang="en-US"/>
           </a:p>
@@ -739,7 +739,7 @@
           <a:p>
             <a:fld id="{E9CC885B-4903-4D54-9A93-00025F12DED9}" type="datetimeFigureOut">
               <a:rPr kumimoji="1" lang="ja-JP" altLang="en-US" smtClean="0"/>
-              <a:t>2025/2/7</a:t>
+              <a:t>2025/2/28</a:t>
             </a:fld>
             <a:endParaRPr kumimoji="1" lang="ja-JP" altLang="en-US"/>
           </a:p>
@@ -969,7 +969,7 @@
           <a:p>
             <a:fld id="{E9CC885B-4903-4D54-9A93-00025F12DED9}" type="datetimeFigureOut">
               <a:rPr kumimoji="1" lang="ja-JP" altLang="en-US" smtClean="0"/>
-              <a:t>2025/2/7</a:t>
+              <a:t>2025/2/28</a:t>
             </a:fld>
             <a:endParaRPr kumimoji="1" lang="ja-JP" altLang="en-US"/>
           </a:p>
@@ -1244,7 +1244,7 @@
           <a:p>
             <a:fld id="{E9CC885B-4903-4D54-9A93-00025F12DED9}" type="datetimeFigureOut">
               <a:rPr kumimoji="1" lang="ja-JP" altLang="en-US" smtClean="0"/>
-              <a:t>2025/2/7</a:t>
+              <a:t>2025/2/28</a:t>
             </a:fld>
             <a:endParaRPr kumimoji="1" lang="ja-JP" altLang="en-US"/>
           </a:p>
@@ -1573,7 +1573,7 @@
           <a:p>
             <a:fld id="{E9CC885B-4903-4D54-9A93-00025F12DED9}" type="datetimeFigureOut">
               <a:rPr kumimoji="1" lang="ja-JP" altLang="en-US" smtClean="0"/>
-              <a:t>2025/2/7</a:t>
+              <a:t>2025/2/28</a:t>
             </a:fld>
             <a:endParaRPr kumimoji="1" lang="ja-JP" altLang="en-US"/>
           </a:p>
@@ -2049,7 +2049,7 @@
           <a:p>
             <a:fld id="{E9CC885B-4903-4D54-9A93-00025F12DED9}" type="datetimeFigureOut">
               <a:rPr kumimoji="1" lang="ja-JP" altLang="en-US" smtClean="0"/>
-              <a:t>2025/2/7</a:t>
+              <a:t>2025/2/28</a:t>
             </a:fld>
             <a:endParaRPr kumimoji="1" lang="ja-JP" altLang="en-US"/>
           </a:p>
@@ -2190,7 +2190,7 @@
           <a:p>
             <a:fld id="{E9CC885B-4903-4D54-9A93-00025F12DED9}" type="datetimeFigureOut">
               <a:rPr kumimoji="1" lang="ja-JP" altLang="en-US" smtClean="0"/>
-              <a:t>2025/2/7</a:t>
+              <a:t>2025/2/28</a:t>
             </a:fld>
             <a:endParaRPr kumimoji="1" lang="ja-JP" altLang="en-US"/>
           </a:p>
@@ -2303,7 +2303,7 @@
           <a:p>
             <a:fld id="{E9CC885B-4903-4D54-9A93-00025F12DED9}" type="datetimeFigureOut">
               <a:rPr kumimoji="1" lang="ja-JP" altLang="en-US" smtClean="0"/>
-              <a:t>2025/2/7</a:t>
+              <a:t>2025/2/28</a:t>
             </a:fld>
             <a:endParaRPr kumimoji="1" lang="ja-JP" altLang="en-US"/>
           </a:p>
@@ -2646,7 +2646,7 @@
           <a:p>
             <a:fld id="{E9CC885B-4903-4D54-9A93-00025F12DED9}" type="datetimeFigureOut">
               <a:rPr kumimoji="1" lang="ja-JP" altLang="en-US" smtClean="0"/>
-              <a:t>2025/2/7</a:t>
+              <a:t>2025/2/28</a:t>
             </a:fld>
             <a:endParaRPr kumimoji="1" lang="ja-JP" altLang="en-US"/>
           </a:p>
@@ -2934,7 +2934,7 @@
           <a:p>
             <a:fld id="{E9CC885B-4903-4D54-9A93-00025F12DED9}" type="datetimeFigureOut">
               <a:rPr kumimoji="1" lang="ja-JP" altLang="en-US" smtClean="0"/>
-              <a:t>2025/2/7</a:t>
+              <a:t>2025/2/28</a:t>
             </a:fld>
             <a:endParaRPr kumimoji="1" lang="ja-JP" altLang="en-US"/>
           </a:p>
@@ -3207,7 +3207,7 @@
           <a:p>
             <a:fld id="{E9CC885B-4903-4D54-9A93-00025F12DED9}" type="datetimeFigureOut">
               <a:rPr kumimoji="1" lang="ja-JP" altLang="en-US" smtClean="0"/>
-              <a:t>2025/2/7</a:t>
+              <a:t>2025/2/28</a:t>
             </a:fld>
             <a:endParaRPr kumimoji="1" lang="ja-JP" altLang="en-US"/>
           </a:p>
@@ -4283,10 +4283,10 @@
       </p:sp>
       <p:pic>
         <p:nvPicPr>
-          <p:cNvPr id="5" name="図 4">
-            <a:extLst>
-              <a:ext uri="{FF2B5EF4-FFF2-40B4-BE49-F238E27FC236}">
-                <a16:creationId xmlns:a16="http://schemas.microsoft.com/office/drawing/2014/main" id="{DF188504-2F55-4C25-96A9-870DC687FC0D}"/>
+          <p:cNvPr id="3" name="図 2">
+            <a:extLst>
+              <a:ext uri="{FF2B5EF4-FFF2-40B4-BE49-F238E27FC236}">
+                <a16:creationId xmlns:a16="http://schemas.microsoft.com/office/drawing/2014/main" id="{3C392DD4-BC5F-41A2-ACE8-205A90D6F80A}"/>
               </a:ext>
             </a:extLst>
           </p:cNvPr>
@@ -4304,7 +4304,7 @@
         <p:spPr>
           <a:xfrm>
             <a:off x="567542" y="1817794"/>
-            <a:ext cx="6829144" cy="4303606"/>
+            <a:ext cx="7076313" cy="4548252"/>
           </a:xfrm>
           <a:prstGeom prst="rect">
             <a:avLst/>
